--- a/Mystery_Malt_Series_No5.pptx
+++ b/Mystery_Malt_Series_No5.pptx
@@ -1967,7 +1967,7 @@
                 <a:ea typeface="Calibri" pitchFamily="34" charset="-122"/>
                 <a:cs typeface="Calibri" pitchFamily="34" charset="-120"/>
               </a:rPr>
-              <a:t>Visit: mysterymalt.example</a:t>
+              <a:t>Visit: thompsonbrostasting.onrender.com</a:t>
             </a:r>
             <a:endParaRPr lang="en-US" sz="1800" dirty="0"/>
           </a:p>
@@ -3267,7 +3267,7 @@
                 <a:ea typeface="Calibri" pitchFamily="34" charset="-122"/>
                 <a:cs typeface="Calibri" pitchFamily="34" charset="-120"/>
               </a:rPr>
-              <a:t>Visit: mysterymalt.example</a:t>
+              <a:t>Visit: thompsonbrostasting.onrender.com</a:t>
             </a:r>
             <a:endParaRPr lang="en-US" sz="1300" dirty="0"/>
           </a:p>
@@ -3662,7 +3662,7 @@
                 <a:ea typeface="Calibri" pitchFamily="34" charset="-122"/>
                 <a:cs typeface="Calibri" pitchFamily="34" charset="-120"/>
               </a:rPr>
-              <a:t>Visit: mysterymalt.example</a:t>
+              <a:t>Visit: thompsonbrostasting.onrender.com</a:t>
             </a:r>
             <a:endParaRPr lang="en-US" sz="1300" dirty="0"/>
           </a:p>
@@ -4057,7 +4057,7 @@
                 <a:ea typeface="Calibri" pitchFamily="34" charset="-122"/>
                 <a:cs typeface="Calibri" pitchFamily="34" charset="-120"/>
               </a:rPr>
-              <a:t>Visit: mysterymalt.example</a:t>
+              <a:t>Visit: thompsonbrostasting.onrender.com</a:t>
             </a:r>
             <a:endParaRPr lang="en-US" sz="1300" dirty="0"/>
           </a:p>
@@ -4452,7 +4452,7 @@
                 <a:ea typeface="Calibri" pitchFamily="34" charset="-122"/>
                 <a:cs typeface="Calibri" pitchFamily="34" charset="-120"/>
               </a:rPr>
-              <a:t>Visit: mysterymalt.example</a:t>
+              <a:t>Visit: thompsonbrostasting.onrender.com</a:t>
             </a:r>
             <a:endParaRPr lang="en-US" sz="1300" dirty="0"/>
           </a:p>
@@ -4847,7 +4847,7 @@
                 <a:ea typeface="Calibri" pitchFamily="34" charset="-122"/>
                 <a:cs typeface="Calibri" pitchFamily="34" charset="-120"/>
               </a:rPr>
-              <a:t>Visit: mysterymalt.example</a:t>
+              <a:t>Visit: thompsonbrostasting.onrender.com</a:t>
             </a:r>
             <a:endParaRPr lang="en-US" sz="1300" dirty="0"/>
           </a:p>
@@ -5242,7 +5242,7 @@
                 <a:ea typeface="Calibri" pitchFamily="34" charset="-122"/>
                 <a:cs typeface="Calibri" pitchFamily="34" charset="-120"/>
               </a:rPr>
-              <a:t>Visit: mysterymalt.example</a:t>
+              <a:t>Visit: thompsonbrostasting.onrender.com</a:t>
             </a:r>
             <a:endParaRPr lang="en-US" sz="1300" dirty="0"/>
           </a:p>
